--- a/classes/parte-14-grc-riesgo-y-cumplimiento/277-gestion-de-riesgos-cuantitativa-y-cualitativa/clase-277-presentacion.pptx
+++ b/classes/parte-14-grc-riesgo-y-cumplimiento/277-gestion-de-riesgos-cuantitativa-y-cualitativa/clase-277-presentacion.pptx
@@ -17,6 +17,10 @@
     <p:sldId id="265" r:id="rId16"/>
     <p:sldId id="266" r:id="rId17"/>
     <p:sldId id="267" r:id="rId18"/>
+    <p:sldId id="268" r:id="rId19"/>
+    <p:sldId id="269" r:id="rId20"/>
+    <p:sldId id="270" r:id="rId21"/>
+    <p:sldId id="271" r:id="rId22"/>
   </p:sldIdLst>
   <p:sldSz cx="9144000" cy="6858000" type="screen4x3"/>
   <p:notesSz cx="6858000" cy="9144000"/>
@@ -3198,7 +3202,7 @@
                   <a:srgbClr val="0B3D2E"/>
                 </a:solidFill>
               </a:rPr>
-              <a:t>⚠️ Errores comunes</a:t>
+              <a:t>🧪 Laboratorio guiado (ejercicio aplicado)</a:t>
             </a:r>
           </a:p>
         </p:txBody>
@@ -3236,67 +3240,97 @@
                   <a:srgbClr val="22282E"/>
                 </a:solidFill>
               </a:rPr>
-              <a:t>•  ALE ridículamente preciso (60.000,00 €) — Falsa precisión; usa rangos con intervalos de confianza</a:t>
-            </a:r>
-          </a:p>
-          <a:p>
-            <a:pPr>
-              <a:spcAft>
-                <a:spcPts val="600"/>
-              </a:spcAft>
-            </a:pPr>
-            <a:r>
-              <a:rPr sz="1500">
-                <a:solidFill>
-                  <a:srgbClr val="22282E"/>
-                </a:solidFill>
-              </a:rPr>
-              <a:t>•  Matriz de colores sin acción — La matriz es triaje, no decisión final; complementa con cuantitativo</a:t>
-            </a:r>
-          </a:p>
-          <a:p>
-            <a:pPr>
-              <a:spcAft>
-                <a:spcPts val="600"/>
-              </a:spcAft>
-            </a:pPr>
-            <a:r>
-              <a:rPr sz="1500">
-                <a:solidFill>
-                  <a:srgbClr val="22282E"/>
-                </a:solidFill>
-              </a:rPr>
-              <a:t>•  ROSI negativo pero se compra el control — Decisión emocional; revisa si hay factor regulatorio o reputacional no modelado</a:t>
-            </a:r>
-          </a:p>
-          <a:p>
-            <a:pPr>
-              <a:spcAft>
-                <a:spcPts val="600"/>
-              </a:spcAft>
-            </a:pPr>
-            <a:r>
-              <a:rPr sz="1500">
-                <a:solidFill>
-                  <a:srgbClr val="22282E"/>
-                </a:solidFill>
-              </a:rPr>
-              <a:t>•  "El riesgo no se puede medir" — Falacia; toda reducción de incertidumbre es medición (Hubbard)</a:t>
-            </a:r>
-          </a:p>
-          <a:p>
-            <a:pPr>
-              <a:spcAft>
-                <a:spcPts val="600"/>
-              </a:spcAft>
-            </a:pPr>
-            <a:r>
-              <a:rPr sz="1500">
-                <a:solidFill>
-                  <a:srgbClr val="22282E"/>
-                </a:solidFill>
-              </a:rPr>
-              <a:t>•  Ignorar el riesgo residual — Documenta y acepta formalmente lo que queda</a:t>
+              <a:t>•  Escenario: ransomware contra la plataforma de e-commerce de "Ferretería del Sur S.A.".</a:t>
+            </a:r>
+          </a:p>
+          <a:p>
+            <a:pPr>
+              <a:spcAft>
+                <a:spcPts val="600"/>
+              </a:spcAft>
+            </a:pPr>
+            <a:r>
+              <a:rPr sz="1500">
+                <a:solidFill>
+                  <a:srgbClr val="22282E"/>
+                </a:solidFill>
+              </a:rPr>
+              <a:t>•  Valora el activo (AV): estima el valor de la plataforma en 500.000 €.</a:t>
+            </a:r>
+          </a:p>
+          <a:p>
+            <a:pPr>
+              <a:spcAft>
+                <a:spcPts val="600"/>
+              </a:spcAft>
+            </a:pPr>
+            <a:r>
+              <a:rPr sz="1500">
+                <a:solidFill>
+                  <a:srgbClr val="22282E"/>
+                </a:solidFill>
+              </a:rPr>
+              <a:t>•  Factor de exposición (EF): un cifrado por ransomware deja el sistema inoperante; estima EF = 0,6 (pérdida del 60%).</a:t>
+            </a:r>
+          </a:p>
+          <a:p>
+            <a:pPr>
+              <a:spcAft>
+                <a:spcPts val="600"/>
+              </a:spcAft>
+            </a:pPr>
+            <a:r>
+              <a:rPr sz="1500">
+                <a:solidFill>
+                  <a:srgbClr val="22282E"/>
+                </a:solidFill>
+              </a:rPr>
+              <a:t>•  SLE: calcula SLE = 500.000 × 0,6 = 300.000 €.</a:t>
+            </a:r>
+          </a:p>
+          <a:p>
+            <a:pPr>
+              <a:spcAft>
+                <a:spcPts val="600"/>
+              </a:spcAft>
+            </a:pPr>
+            <a:r>
+              <a:rPr sz="1500">
+                <a:solidFill>
+                  <a:srgbClr val="22282E"/>
+                </a:solidFill>
+              </a:rPr>
+              <a:t>•  ARO: según incidentes del sector estimas 0,2 (uno cada 5 años). Calcula ALE = 300.000 × 0,2 = 60.000 €/año.</a:t>
+            </a:r>
+          </a:p>
+          <a:p>
+            <a:pPr>
+              <a:spcAft>
+                <a:spcPts val="600"/>
+              </a:spcAft>
+            </a:pPr>
+            <a:r>
+              <a:rPr sz="1500">
+                <a:solidFill>
+                  <a:srgbClr val="22282E"/>
+                </a:solidFill>
+              </a:rPr>
+              <a:t>•  Control propuesto: backups inmutables + EDR por 25.000 €/año, que reducen el ARO a 0,05. Nuevo ALEdespués = 300.000 × 0,05 = 15.000 €.</a:t>
+            </a:r>
+          </a:p>
+          <a:p>
+            <a:pPr>
+              <a:spcAft>
+                <a:spcPts val="600"/>
+              </a:spcAft>
+            </a:pPr>
+            <a:r>
+              <a:rPr sz="1500">
+                <a:solidFill>
+                  <a:srgbClr val="22282E"/>
+                </a:solidFill>
+              </a:rPr>
+              <a:t>•  ROSI: (60.000 − 15.000 − 25.000) / 25.000 = 0,8 → 80% de retorno. El control se justifica.</a:t>
             </a:r>
           </a:p>
         </p:txBody>
@@ -3347,7 +3381,7 @@
                   <a:srgbClr val="0B3D2E"/>
                 </a:solidFill>
               </a:rPr>
-              <a:t>❓ Preguntas frecuentes</a:t>
+              <a:t>✍️ Ejercicios</a:t>
             </a:r>
           </a:p>
         </p:txBody>
@@ -3385,97 +3419,82 @@
                   <a:srgbClr val="22282E"/>
                 </a:solidFill>
               </a:rPr>
-              <a:t>•  ❓ ¿Cuantitativo o cualitativo?</a:t>
-            </a:r>
-          </a:p>
-          <a:p>
-            <a:pPr>
-              <a:spcAft>
-                <a:spcPts val="600"/>
-              </a:spcAft>
-            </a:pPr>
-            <a:r>
-              <a:rPr sz="1500">
-                <a:solidFill>
-                  <a:srgbClr val="22282E"/>
-                </a:solidFill>
-              </a:rPr>
-              <a:t>•  Ambos. El cualitativo prioriza rápido; el cuantitativo justifica inversiones y se comunica con la dirección. Empieza cualitativo, profundiza cuantitativo en los riesgos top.</a:t>
-            </a:r>
-          </a:p>
-          <a:p>
-            <a:pPr>
-              <a:spcAft>
-                <a:spcPts val="600"/>
-              </a:spcAft>
-            </a:pPr>
-            <a:r>
-              <a:rPr sz="1500">
-                <a:solidFill>
-                  <a:srgbClr val="22282E"/>
-                </a:solidFill>
-              </a:rPr>
-              <a:t>•  ❓ ¿De dónde saco el ARO si no tengo datos?</a:t>
-            </a:r>
-          </a:p>
-          <a:p>
-            <a:pPr>
-              <a:spcAft>
-                <a:spcPts val="600"/>
-              </a:spcAft>
-            </a:pPr>
-            <a:r>
-              <a:rPr sz="1500">
-                <a:solidFill>
-                  <a:srgbClr val="22282E"/>
-                </a:solidFill>
-              </a:rPr>
-              <a:t>•  De informes del sector (Verizon DBIR), datos históricos internos y estimación calibrada por expertos. La incertidumbre se modela, no se elimina.</a:t>
-            </a:r>
-          </a:p>
-          <a:p>
-            <a:pPr>
-              <a:spcAft>
-                <a:spcPts val="600"/>
-              </a:spcAft>
-            </a:pPr>
-            <a:r>
-              <a:rPr sz="1500">
-                <a:solidFill>
-                  <a:srgbClr val="22282E"/>
-                </a:solidFill>
-              </a:rPr>
-              <a:t>•  ❓ ¿Qué es FAIR?</a:t>
-            </a:r>
-          </a:p>
-          <a:p>
-            <a:pPr>
-              <a:spcAft>
-                <a:spcPts val="600"/>
-              </a:spcAft>
-            </a:pPr>
-            <a:r>
-              <a:rPr sz="1500">
-                <a:solidFill>
-                  <a:srgbClr val="22282E"/>
-                </a:solidFill>
-              </a:rPr>
-              <a:t>•  Un marco cuantitativo estándar que descompone el riesgo en frecuencia y magnitud de pérdida. Complementa muy bien SLE/ARO/ALE.</a:t>
-            </a:r>
-          </a:p>
-          <a:p>
-            <a:pPr>
-              <a:spcAft>
-                <a:spcPts val="600"/>
-              </a:spcAft>
-            </a:pPr>
-            <a:r>
-              <a:rPr sz="1500">
-                <a:solidFill>
-                  <a:srgbClr val="22282E"/>
-                </a:solidFill>
-              </a:rPr>
-              <a:t>•  ❓ ¿La matriz 5×5 tiene problemas?</a:t>
+              <a:t>•  Calcula el ALE de un robo de portátil: AV=1.500 €, EF=1, ARO=3.</a:t>
+            </a:r>
+          </a:p>
+          <a:p>
+            <a:pPr>
+              <a:spcAft>
+                <a:spcPts val="600"/>
+              </a:spcAft>
+            </a:pPr>
+            <a:r>
+              <a:rPr sz="1500">
+                <a:solidFill>
+                  <a:srgbClr val="22282E"/>
+                </a:solidFill>
+              </a:rPr>
+              <a:t>•  Un control cuesta 10.000 € y baja el ALE de 40.000 a 12.000 €. ¿Cuál es el ROSI?</a:t>
+            </a:r>
+          </a:p>
+          <a:p>
+            <a:pPr>
+              <a:spcAft>
+                <a:spcPts val="600"/>
+              </a:spcAft>
+            </a:pPr>
+            <a:r>
+              <a:rPr sz="1500">
+                <a:solidFill>
+                  <a:srgbClr val="22282E"/>
+                </a:solidFill>
+              </a:rPr>
+              <a:t>•  Convierte esta matriz cualitativa a decisión: probabilidad media, impacto catastrófico. ¿Aceptas o mitigas?</a:t>
+            </a:r>
+          </a:p>
+          <a:p>
+            <a:pPr>
+              <a:spcAft>
+                <a:spcPts val="600"/>
+              </a:spcAft>
+            </a:pPr>
+            <a:r>
+              <a:rPr sz="1500">
+                <a:solidFill>
+                  <a:srgbClr val="22282E"/>
+                </a:solidFill>
+              </a:rPr>
+              <a:t>•  Da un intervalo de confianza del 90% para "cuántos empleados hará clic en un phishing de 100 enviados". Justifica.</a:t>
+            </a:r>
+          </a:p>
+          <a:p>
+            <a:pPr>
+              <a:spcAft>
+                <a:spcPts val="600"/>
+              </a:spcAft>
+            </a:pPr>
+            <a:r>
+              <a:rPr sz="1500">
+                <a:solidFill>
+                  <a:srgbClr val="22282E"/>
+                </a:solidFill>
+              </a:rPr>
+              <a:t>•  Explica por qué el ALE puede engañar cuando el impacto es raro pero catastrófico (cola larga).</a:t>
+            </a:r>
+          </a:p>
+          <a:p>
+            <a:pPr>
+              <a:spcAft>
+                <a:spcPts val="600"/>
+              </a:spcAft>
+            </a:pPr>
+            <a:r>
+              <a:rPr sz="1500">
+                <a:solidFill>
+                  <a:srgbClr val="22282E"/>
+                </a:solidFill>
+              </a:rPr>
+              <a:t>•  Diseña un Montecarlo para una brecha de datos con multa GDPR variable.</a:t>
             </a:r>
           </a:p>
         </p:txBody>
@@ -3526,7 +3545,7 @@
                   <a:srgbClr val="0B3D2E"/>
                 </a:solidFill>
               </a:rPr>
-              <a:t>🔗 Referencias</a:t>
+              <a:t>📝 Reto verificable</a:t>
             </a:r>
           </a:p>
         </p:txBody>
@@ -3564,6 +3583,438 @@
                   <a:srgbClr val="22282E"/>
                 </a:solidFill>
               </a:rPr>
+              <a:t>•  Entrega una hoja de cálculo de análisis de riesgo cuantitativo para tres escenarios (ransomware, brecha de datos, caída de disponibilidad) con SLE, ARO, ALE, control propuesto, ALE residual y ROSI de…</a:t>
+            </a:r>
+          </a:p>
+          <a:p>
+            <a:pPr>
+              <a:spcAft>
+                <a:spcPts val="600"/>
+              </a:spcAft>
+            </a:pPr>
+            <a:r>
+              <a:rPr sz="1500">
+                <a:solidFill>
+                  <a:srgbClr val="22282E"/>
+                </a:solidFill>
+              </a:rPr>
+              <a:t>•  Criterio de aceptación: las fórmulas están enlazadas (no números pegados), cada control muestra un ROSI calculado, y la recomendación de tratamiento (mitigar/transferir/aceptar) es coherente con el…</a:t>
+            </a:r>
+          </a:p>
+        </p:txBody>
+      </p:sp>
+    </p:spTree>
+  </p:cSld>
+  <p:clrMapOvr>
+    <a:masterClrMapping/>
+  </p:clrMapOvr>
+</p:sld>
+</file>
+
+<file path=ppt/slides/slide13.xml><?xml version="1.0" encoding="utf-8"?>
+<p:sld xmlns:a="http://schemas.openxmlformats.org/drawingml/2006/main" xmlns:p="http://schemas.openxmlformats.org/presentationml/2006/main" xmlns:r="http://schemas.openxmlformats.org/officeDocument/2006/relationships">
+  <p:cSld>
+    <p:spTree>
+      <p:nvGrpSpPr>
+        <p:cNvPr id="1" name=""/>
+        <p:cNvGrpSpPr/>
+        <p:nvPr/>
+      </p:nvGrpSpPr>
+      <p:grpSpPr/>
+      <p:sp>
+        <p:nvSpPr>
+          <p:cNvPr id="2" name="TextBox 1"/>
+          <p:cNvSpPr txBox="1"/>
+          <p:nvPr/>
+        </p:nvSpPr>
+        <p:spPr>
+          <a:xfrm>
+            <a:off x="457200" y="320040"/>
+            <a:ext cx="8229600" cy="822960"/>
+          </a:xfrm>
+          <a:prstGeom prst="rect">
+            <a:avLst/>
+          </a:prstGeom>
+          <a:noFill/>
+        </p:spPr>
+        <p:txBody>
+          <a:bodyPr wrap="square">
+            <a:spAutoFit/>
+          </a:bodyPr>
+          <a:lstStyle/>
+          <a:p>
+            <a:r>
+              <a:rPr sz="2600" b="1">
+                <a:solidFill>
+                  <a:srgbClr val="0B3D2E"/>
+                </a:solidFill>
+              </a:rPr>
+              <a:t>⚠️ Errores comunes</a:t>
+            </a:r>
+          </a:p>
+        </p:txBody>
+      </p:sp>
+      <p:sp>
+        <p:nvSpPr>
+          <p:cNvPr id="3" name="TextBox 2"/>
+          <p:cNvSpPr txBox="1"/>
+          <p:nvPr/>
+        </p:nvSpPr>
+        <p:spPr>
+          <a:xfrm>
+            <a:off x="457200" y="1280160"/>
+            <a:ext cx="8229600" cy="4937760"/>
+          </a:xfrm>
+          <a:prstGeom prst="rect">
+            <a:avLst/>
+          </a:prstGeom>
+          <a:noFill/>
+        </p:spPr>
+        <p:txBody>
+          <a:bodyPr wrap="square">
+            <a:spAutoFit/>
+          </a:bodyPr>
+          <a:lstStyle/>
+          <a:p>
+            <a:pPr>
+              <a:spcAft>
+                <a:spcPts val="600"/>
+              </a:spcAft>
+            </a:pPr>
+            <a:r>
+              <a:rPr sz="1500">
+                <a:solidFill>
+                  <a:srgbClr val="22282E"/>
+                </a:solidFill>
+              </a:rPr>
+              <a:t>•  ALE ridículamente preciso (60.000,00 €) — Falsa precisión; usa rangos con intervalos de confianza</a:t>
+            </a:r>
+          </a:p>
+          <a:p>
+            <a:pPr>
+              <a:spcAft>
+                <a:spcPts val="600"/>
+              </a:spcAft>
+            </a:pPr>
+            <a:r>
+              <a:rPr sz="1500">
+                <a:solidFill>
+                  <a:srgbClr val="22282E"/>
+                </a:solidFill>
+              </a:rPr>
+              <a:t>•  Matriz de colores sin acción — La matriz es triaje, no decisión final; complementa con cuantitativo</a:t>
+            </a:r>
+          </a:p>
+          <a:p>
+            <a:pPr>
+              <a:spcAft>
+                <a:spcPts val="600"/>
+              </a:spcAft>
+            </a:pPr>
+            <a:r>
+              <a:rPr sz="1500">
+                <a:solidFill>
+                  <a:srgbClr val="22282E"/>
+                </a:solidFill>
+              </a:rPr>
+              <a:t>•  ROSI negativo pero se compra el control — Decisión emocional; revisa si hay factor regulatorio o reputacional no modelado</a:t>
+            </a:r>
+          </a:p>
+          <a:p>
+            <a:pPr>
+              <a:spcAft>
+                <a:spcPts val="600"/>
+              </a:spcAft>
+            </a:pPr>
+            <a:r>
+              <a:rPr sz="1500">
+                <a:solidFill>
+                  <a:srgbClr val="22282E"/>
+                </a:solidFill>
+              </a:rPr>
+              <a:t>•  "El riesgo no se puede medir" — Falacia; toda reducción de incertidumbre es medición (Hubbard)</a:t>
+            </a:r>
+          </a:p>
+          <a:p>
+            <a:pPr>
+              <a:spcAft>
+                <a:spcPts val="600"/>
+              </a:spcAft>
+            </a:pPr>
+            <a:r>
+              <a:rPr sz="1500">
+                <a:solidFill>
+                  <a:srgbClr val="22282E"/>
+                </a:solidFill>
+              </a:rPr>
+              <a:t>•  Ignorar el riesgo residual — Documenta y acepta formalmente lo que queda</a:t>
+            </a:r>
+          </a:p>
+        </p:txBody>
+      </p:sp>
+    </p:spTree>
+  </p:cSld>
+  <p:clrMapOvr>
+    <a:masterClrMapping/>
+  </p:clrMapOvr>
+</p:sld>
+</file>
+
+<file path=ppt/slides/slide14.xml><?xml version="1.0" encoding="utf-8"?>
+<p:sld xmlns:a="http://schemas.openxmlformats.org/drawingml/2006/main" xmlns:p="http://schemas.openxmlformats.org/presentationml/2006/main" xmlns:r="http://schemas.openxmlformats.org/officeDocument/2006/relationships">
+  <p:cSld>
+    <p:spTree>
+      <p:nvGrpSpPr>
+        <p:cNvPr id="1" name=""/>
+        <p:cNvGrpSpPr/>
+        <p:nvPr/>
+      </p:nvGrpSpPr>
+      <p:grpSpPr/>
+      <p:sp>
+        <p:nvSpPr>
+          <p:cNvPr id="2" name="TextBox 1"/>
+          <p:cNvSpPr txBox="1"/>
+          <p:nvPr/>
+        </p:nvSpPr>
+        <p:spPr>
+          <a:xfrm>
+            <a:off x="457200" y="320040"/>
+            <a:ext cx="8229600" cy="822960"/>
+          </a:xfrm>
+          <a:prstGeom prst="rect">
+            <a:avLst/>
+          </a:prstGeom>
+          <a:noFill/>
+        </p:spPr>
+        <p:txBody>
+          <a:bodyPr wrap="square">
+            <a:spAutoFit/>
+          </a:bodyPr>
+          <a:lstStyle/>
+          <a:p>
+            <a:r>
+              <a:rPr sz="2600" b="1">
+                <a:solidFill>
+                  <a:srgbClr val="0B3D2E"/>
+                </a:solidFill>
+              </a:rPr>
+              <a:t>❓ Preguntas frecuentes</a:t>
+            </a:r>
+          </a:p>
+        </p:txBody>
+      </p:sp>
+      <p:sp>
+        <p:nvSpPr>
+          <p:cNvPr id="3" name="TextBox 2"/>
+          <p:cNvSpPr txBox="1"/>
+          <p:nvPr/>
+        </p:nvSpPr>
+        <p:spPr>
+          <a:xfrm>
+            <a:off x="457200" y="1280160"/>
+            <a:ext cx="8229600" cy="4937760"/>
+          </a:xfrm>
+          <a:prstGeom prst="rect">
+            <a:avLst/>
+          </a:prstGeom>
+          <a:noFill/>
+        </p:spPr>
+        <p:txBody>
+          <a:bodyPr wrap="square">
+            <a:spAutoFit/>
+          </a:bodyPr>
+          <a:lstStyle/>
+          <a:p>
+            <a:pPr>
+              <a:spcAft>
+                <a:spcPts val="600"/>
+              </a:spcAft>
+            </a:pPr>
+            <a:r>
+              <a:rPr sz="1500">
+                <a:solidFill>
+                  <a:srgbClr val="22282E"/>
+                </a:solidFill>
+              </a:rPr>
+              <a:t>•  ❓ ¿Cuantitativo o cualitativo?</a:t>
+            </a:r>
+          </a:p>
+          <a:p>
+            <a:pPr>
+              <a:spcAft>
+                <a:spcPts val="600"/>
+              </a:spcAft>
+            </a:pPr>
+            <a:r>
+              <a:rPr sz="1500">
+                <a:solidFill>
+                  <a:srgbClr val="22282E"/>
+                </a:solidFill>
+              </a:rPr>
+              <a:t>•  Ambos. El cualitativo prioriza rápido; el cuantitativo justifica inversiones y se comunica con la dirección. Empieza cualitativo, profundiza cuantitativo en los riesgos top.</a:t>
+            </a:r>
+          </a:p>
+          <a:p>
+            <a:pPr>
+              <a:spcAft>
+                <a:spcPts val="600"/>
+              </a:spcAft>
+            </a:pPr>
+            <a:r>
+              <a:rPr sz="1500">
+                <a:solidFill>
+                  <a:srgbClr val="22282E"/>
+                </a:solidFill>
+              </a:rPr>
+              <a:t>•  ❓ ¿De dónde saco el ARO si no tengo datos?</a:t>
+            </a:r>
+          </a:p>
+          <a:p>
+            <a:pPr>
+              <a:spcAft>
+                <a:spcPts val="600"/>
+              </a:spcAft>
+            </a:pPr>
+            <a:r>
+              <a:rPr sz="1500">
+                <a:solidFill>
+                  <a:srgbClr val="22282E"/>
+                </a:solidFill>
+              </a:rPr>
+              <a:t>•  De informes del sector (Verizon DBIR), datos históricos internos y estimación calibrada por expertos. La incertidumbre se modela, no se elimina.</a:t>
+            </a:r>
+          </a:p>
+          <a:p>
+            <a:pPr>
+              <a:spcAft>
+                <a:spcPts val="600"/>
+              </a:spcAft>
+            </a:pPr>
+            <a:r>
+              <a:rPr sz="1500">
+                <a:solidFill>
+                  <a:srgbClr val="22282E"/>
+                </a:solidFill>
+              </a:rPr>
+              <a:t>•  ❓ ¿Qué es FAIR?</a:t>
+            </a:r>
+          </a:p>
+          <a:p>
+            <a:pPr>
+              <a:spcAft>
+                <a:spcPts val="600"/>
+              </a:spcAft>
+            </a:pPr>
+            <a:r>
+              <a:rPr sz="1500">
+                <a:solidFill>
+                  <a:srgbClr val="22282E"/>
+                </a:solidFill>
+              </a:rPr>
+              <a:t>•  Un marco cuantitativo estándar que descompone el riesgo en frecuencia y magnitud de pérdida. Complementa muy bien SLE/ARO/ALE.</a:t>
+            </a:r>
+          </a:p>
+          <a:p>
+            <a:pPr>
+              <a:spcAft>
+                <a:spcPts val="600"/>
+              </a:spcAft>
+            </a:pPr>
+            <a:r>
+              <a:rPr sz="1500">
+                <a:solidFill>
+                  <a:srgbClr val="22282E"/>
+                </a:solidFill>
+              </a:rPr>
+              <a:t>•  ❓ ¿La matriz 5×5 tiene problemas?</a:t>
+            </a:r>
+          </a:p>
+        </p:txBody>
+      </p:sp>
+    </p:spTree>
+  </p:cSld>
+  <p:clrMapOvr>
+    <a:masterClrMapping/>
+  </p:clrMapOvr>
+</p:sld>
+</file>
+
+<file path=ppt/slides/slide15.xml><?xml version="1.0" encoding="utf-8"?>
+<p:sld xmlns:a="http://schemas.openxmlformats.org/drawingml/2006/main" xmlns:p="http://schemas.openxmlformats.org/presentationml/2006/main" xmlns:r="http://schemas.openxmlformats.org/officeDocument/2006/relationships">
+  <p:cSld>
+    <p:spTree>
+      <p:nvGrpSpPr>
+        <p:cNvPr id="1" name=""/>
+        <p:cNvGrpSpPr/>
+        <p:nvPr/>
+      </p:nvGrpSpPr>
+      <p:grpSpPr/>
+      <p:sp>
+        <p:nvSpPr>
+          <p:cNvPr id="2" name="TextBox 1"/>
+          <p:cNvSpPr txBox="1"/>
+          <p:nvPr/>
+        </p:nvSpPr>
+        <p:spPr>
+          <a:xfrm>
+            <a:off x="457200" y="320040"/>
+            <a:ext cx="8229600" cy="822960"/>
+          </a:xfrm>
+          <a:prstGeom prst="rect">
+            <a:avLst/>
+          </a:prstGeom>
+          <a:noFill/>
+        </p:spPr>
+        <p:txBody>
+          <a:bodyPr wrap="square">
+            <a:spAutoFit/>
+          </a:bodyPr>
+          <a:lstStyle/>
+          <a:p>
+            <a:r>
+              <a:rPr sz="2600" b="1">
+                <a:solidFill>
+                  <a:srgbClr val="0B3D2E"/>
+                </a:solidFill>
+              </a:rPr>
+              <a:t>🔗 Referencias</a:t>
+            </a:r>
+          </a:p>
+        </p:txBody>
+      </p:sp>
+      <p:sp>
+        <p:nvSpPr>
+          <p:cNvPr id="3" name="TextBox 2"/>
+          <p:cNvSpPr txBox="1"/>
+          <p:nvPr/>
+        </p:nvSpPr>
+        <p:spPr>
+          <a:xfrm>
+            <a:off x="457200" y="1280160"/>
+            <a:ext cx="8229600" cy="4937760"/>
+          </a:xfrm>
+          <a:prstGeom prst="rect">
+            <a:avLst/>
+          </a:prstGeom>
+          <a:noFill/>
+        </p:spPr>
+        <p:txBody>
+          <a:bodyPr wrap="square">
+            <a:spAutoFit/>
+          </a:bodyPr>
+          <a:lstStyle/>
+          <a:p>
+            <a:pPr>
+              <a:spcAft>
+                <a:spcPts val="600"/>
+              </a:spcAft>
+            </a:pPr>
+            <a:r>
+              <a:rPr sz="1500">
+                <a:solidFill>
+                  <a:srgbClr val="22282E"/>
+                </a:solidFill>
+              </a:rPr>
               <a:t>•  Hubbard &amp; Seiersen — How to Measure Anything in Cybersecurity Risk. &lt;https://www.howtomeasureanything.com/cybersecurity/&gt;</a:t>
             </a:r>
           </a:p>
@@ -3629,6 +4080,81 @@
           </a:p>
         </p:txBody>
       </p:sp>
+    </p:spTree>
+  </p:cSld>
+  <p:clrMapOvr>
+    <a:masterClrMapping/>
+  </p:clrMapOvr>
+</p:sld>
+</file>
+
+<file path=ppt/slides/slide16.xml><?xml version="1.0" encoding="utf-8"?>
+<p:sld xmlns:a="http://schemas.openxmlformats.org/drawingml/2006/main" xmlns:p="http://schemas.openxmlformats.org/presentationml/2006/main" xmlns:r="http://schemas.openxmlformats.org/officeDocument/2006/relationships">
+  <p:cSld>
+    <p:spTree>
+      <p:nvGrpSpPr>
+        <p:cNvPr id="1" name=""/>
+        <p:cNvGrpSpPr/>
+        <p:nvPr/>
+      </p:nvGrpSpPr>
+      <p:grpSpPr/>
+      <p:sp>
+        <p:nvSpPr>
+          <p:cNvPr id="2" name="TextBox 1"/>
+          <p:cNvSpPr txBox="1"/>
+          <p:nvPr/>
+        </p:nvSpPr>
+        <p:spPr>
+          <a:xfrm>
+            <a:off x="457200" y="274320"/>
+            <a:ext cx="8229600" cy="640080"/>
+          </a:xfrm>
+          <a:prstGeom prst="rect">
+            <a:avLst/>
+          </a:prstGeom>
+          <a:noFill/>
+        </p:spPr>
+        <p:txBody>
+          <a:bodyPr wrap="square">
+            <a:spAutoFit/>
+          </a:bodyPr>
+          <a:lstStyle/>
+          <a:p>
+            <a:r>
+              <a:rPr sz="2200" b="1">
+                <a:solidFill>
+                  <a:srgbClr val="0B3D2E"/>
+                </a:solidFill>
+              </a:rPr>
+              <a:t>Diagrama de la clase</a:t>
+            </a:r>
+          </a:p>
+        </p:txBody>
+      </p:sp>
+      <p:pic>
+        <p:nvPicPr>
+          <p:cNvPr id="3" name="Picture 2" descr="ac2935fd2ae0e34e.png"/>
+          <p:cNvPicPr>
+            <a:picLocks noChangeAspect="1"/>
+          </p:cNvPicPr>
+          <p:nvPr/>
+        </p:nvPicPr>
+        <p:blipFill>
+          <a:blip r:embed="rId2"/>
+          <a:stretch>
+            <a:fillRect/>
+          </a:stretch>
+        </p:blipFill>
+        <p:spPr>
+          <a:xfrm>
+            <a:off x="457200" y="2875788"/>
+            <a:ext cx="8229600" cy="1746504"/>
+          </a:xfrm>
+          <a:prstGeom prst="rect">
+            <a:avLst/>
+          </a:prstGeom>
+        </p:spPr>
+      </p:pic>
     </p:spTree>
   </p:cSld>
   <p:clrMapOvr>
@@ -3713,7 +4239,7 @@
                   <a:srgbClr val="22282E"/>
                 </a:solidFill>
               </a:rPr>
-              <a:t>•  Aprender a evaluar el riesgo de seguridad de forma rigurosa, tanto con métodos cualitativos (matrices de probabilidad × impacto) como cuantitativos (SLE, ARO, ALE y modelos probabilísticos). Al terminar sabrás calcular la pérdida anual esperada de un escenario, decidir si un control se justifica económicamente y comunicar riesgo en términos que la dirección entiende: dinero y probabilidad, no colores.</a:t>
+              <a:t>•  Aprender a evaluar el riesgo de seguridad de forma rigurosa, tanto con métodos cualitativos (matrices de probabilidad × impacto) como cuantitativos (SLE, ARO, ALE y modelos probabilísticos). Al…</a:t>
             </a:r>
           </a:p>
         </p:txBody>
@@ -4107,7 +4633,7 @@
                   <a:srgbClr val="0B3D2E"/>
                 </a:solidFill>
               </a:rPr>
-              <a:t>📖 Definiciones y características</a:t>
+              <a:t>🧠 Explicación en profundidad</a:t>
             </a:r>
           </a:p>
         </p:txBody>
@@ -4145,97 +4671,22 @@
                   <a:srgbClr val="22282E"/>
                 </a:solidFill>
               </a:rPr>
-              <a:t>•  Riesgo: probabilidad de que una amenaza explote una vulnerabilidad causando un impacto. Clave: riesgo = f(probabilidad, impacto).</a:t>
-            </a:r>
-          </a:p>
-          <a:p>
-            <a:pPr>
-              <a:spcAft>
-                <a:spcPts val="600"/>
-              </a:spcAft>
-            </a:pPr>
-            <a:r>
-              <a:rPr sz="1500">
-                <a:solidFill>
-                  <a:srgbClr val="22282E"/>
-                </a:solidFill>
-              </a:rPr>
-              <a:t>•  SLE (Single Loss Expectancy): pérdida esperada de un único incidente. Clave: SLE = Valor del activo (AV) × Factor de exposición (EF).</a:t>
-            </a:r>
-          </a:p>
-          <a:p>
-            <a:pPr>
-              <a:spcAft>
-                <a:spcPts val="600"/>
-              </a:spcAft>
-            </a:pPr>
-            <a:r>
-              <a:rPr sz="1500">
-                <a:solidFill>
-                  <a:srgbClr val="22282E"/>
-                </a:solidFill>
-              </a:rPr>
-              <a:t>•  ARO (Annualized Rate of Occurrence): número esperado de ocurrencias al año. Clave: 0,1 significa "una vez cada 10 años".</a:t>
-            </a:r>
-          </a:p>
-          <a:p>
-            <a:pPr>
-              <a:spcAft>
-                <a:spcPts val="600"/>
-              </a:spcAft>
-            </a:pPr>
-            <a:r>
-              <a:rPr sz="1500">
-                <a:solidFill>
-                  <a:srgbClr val="22282E"/>
-                </a:solidFill>
-              </a:rPr>
-              <a:t>•  ALE (Annualized Loss Expectancy): pérdida anual esperada. Clave: ALE = SLE × ARO.</a:t>
-            </a:r>
-          </a:p>
-          <a:p>
-            <a:pPr>
-              <a:spcAft>
-                <a:spcPts val="600"/>
-              </a:spcAft>
-            </a:pPr>
-            <a:r>
-              <a:rPr sz="1500">
-                <a:solidFill>
-                  <a:srgbClr val="22282E"/>
-                </a:solidFill>
-              </a:rPr>
-              <a:t>•  ROSI: retorno de inversión en seguridad. Clave: ROSI = (ALEantes − ALEdespués − costecontrol) / costecontrol.</a:t>
-            </a:r>
-          </a:p>
-          <a:p>
-            <a:pPr>
-              <a:spcAft>
-                <a:spcPts val="600"/>
-              </a:spcAft>
-            </a:pPr>
-            <a:r>
-              <a:rPr sz="1500">
-                <a:solidFill>
-                  <a:srgbClr val="22282E"/>
-                </a:solidFill>
-              </a:rPr>
-              <a:t>•  Riesgo residual: el que queda tras aplicar controles. Clave: nunca es cero; se acepta formalmente.</a:t>
-            </a:r>
-          </a:p>
-          <a:p>
-            <a:pPr>
-              <a:spcAft>
-                <a:spcPts val="600"/>
-              </a:spcAft>
-            </a:pPr>
-            <a:r>
-              <a:rPr sz="1500">
-                <a:solidFill>
-                  <a:srgbClr val="22282E"/>
-                </a:solidFill>
-              </a:rPr>
-              <a:t>•  Estimación calibrada: dar rangos con un intervalo de confianza (p. ej. 90%) en lugar de un punto. Clave: reduce el exceso de confianza del experto.</a:t>
+              <a:t>•  El riesgo combina escenarios, frecuencia y magnitud de pérdida bajo incertidumbre. Una matriz cualitativa facilita conversación, pero multiplicar ordinales no crea dinero ni probabilidad. El análisis…</a:t>
+            </a:r>
+          </a:p>
+          <a:p>
+            <a:pPr>
+              <a:spcAft>
+                <a:spcPts val="600"/>
+              </a:spcAft>
+            </a:pPr>
+            <a:r>
+              <a:rPr sz="1500">
+                <a:solidFill>
+                  <a:srgbClr val="22282E"/>
+                </a:solidFill>
+              </a:rPr>
+              <a:t>•  Dos riesgos quedan «altos» en una matriz. Uno puede interrumpir ventas por horas; otro generar daño regulatorio de cola larga. Rangos y escenarios separan decisiones. El resultado se presenta como…</a:t>
             </a:r>
           </a:p>
         </p:txBody>
@@ -4286,7 +4737,7 @@
                   <a:srgbClr val="0B3D2E"/>
                 </a:solidFill>
               </a:rPr>
-              <a:t>🧰 Herramientas y preparación</a:t>
+              <a:t>📔 Glosario operativo</a:t>
             </a:r>
           </a:p>
         </p:txBody>
@@ -4324,52 +4775,52 @@
                   <a:srgbClr val="22282E"/>
                 </a:solidFill>
               </a:rPr>
-              <a:t>•  Hoja de cálculo (LibreOffice Calc / Excel / Google Sheets) para las fórmulas SLE/ARO/ALE.</a:t>
-            </a:r>
-          </a:p>
-          <a:p>
-            <a:pPr>
-              <a:spcAft>
-                <a:spcPts val="600"/>
-              </a:spcAft>
-            </a:pPr>
-            <a:r>
-              <a:rPr sz="1500">
-                <a:solidFill>
-                  <a:srgbClr val="22282E"/>
-                </a:solidFill>
-              </a:rPr>
-              <a:t>•  Opcional: Python con numpy para una simulación de Montecarlo (pip install numpy).</a:t>
-            </a:r>
-          </a:p>
-          <a:p>
-            <a:pPr>
-              <a:spcAft>
-                <a:spcPts val="600"/>
-              </a:spcAft>
-            </a:pPr>
-            <a:r>
-              <a:rPr sz="1500">
-                <a:solidFill>
-                  <a:srgbClr val="22282E"/>
-                </a:solidFill>
-              </a:rPr>
-              <a:t>•  Referencia metodológica: FAIR (Factor Analysis of Information Risk) de The Open Group, y NIST SP 800-30 (Guide for Conducting Risk Assessments).</a:t>
-            </a:r>
-          </a:p>
-          <a:p>
-            <a:pPr>
-              <a:spcAft>
-                <a:spcPts val="600"/>
-              </a:spcAft>
-            </a:pPr>
-            <a:r>
-              <a:rPr sz="1500">
-                <a:solidFill>
-                  <a:srgbClr val="22282E"/>
-                </a:solidFill>
-              </a:rPr>
-              <a:t>•  Una plantilla de matriz de riesgo 5×5 (la crearás tú en el laboratorio).</a:t>
+              <a:t>•  Término — Definición</a:t>
+            </a:r>
+          </a:p>
+          <a:p>
+            <a:pPr>
+              <a:spcAft>
+                <a:spcPts val="600"/>
+              </a:spcAft>
+            </a:pPr>
+            <a:r>
+              <a:rPr sz="1500">
+                <a:solidFill>
+                  <a:srgbClr val="22282E"/>
+                </a:solidFill>
+              </a:rPr>
+              <a:t>•  Escenario de pérdida — Cadena concreta que conecta amenaza, activo y consecuencia.</a:t>
+            </a:r>
+          </a:p>
+          <a:p>
+            <a:pPr>
+              <a:spcAft>
+                <a:spcPts val="600"/>
+              </a:spcAft>
+            </a:pPr>
+            <a:r>
+              <a:rPr sz="1500">
+                <a:solidFill>
+                  <a:srgbClr val="22282E"/>
+                </a:solidFill>
+              </a:rPr>
+              <a:t>•  Incertidumbre — Falta de conocimiento representada y comunicada explícitamente.</a:t>
+            </a:r>
+          </a:p>
+          <a:p>
+            <a:pPr>
+              <a:spcAft>
+                <a:spcPts val="600"/>
+              </a:spcAft>
+            </a:pPr>
+            <a:r>
+              <a:rPr sz="1500">
+                <a:solidFill>
+                  <a:srgbClr val="22282E"/>
+                </a:solidFill>
+              </a:rPr>
+              <a:t>•  Sensibilidad — Cambio del resultado al variar un supuesto.</a:t>
             </a:r>
           </a:p>
         </p:txBody>
@@ -4420,7 +4871,7 @@
                   <a:srgbClr val="0B3D2E"/>
                 </a:solidFill>
               </a:rPr>
-              <a:t>🧪 Laboratorio guiado (ejercicio aplicado)</a:t>
+              <a:t>✅ Criterio de dominio</a:t>
             </a:r>
           </a:p>
         </p:txBody>
@@ -4458,97 +4909,7 @@
                   <a:srgbClr val="22282E"/>
                 </a:solidFill>
               </a:rPr>
-              <a:t>•  Escenario: ransomware contra la plataforma de e-commerce de "Ferretería del Sur S.A.".</a:t>
-            </a:r>
-          </a:p>
-          <a:p>
-            <a:pPr>
-              <a:spcAft>
-                <a:spcPts val="600"/>
-              </a:spcAft>
-            </a:pPr>
-            <a:r>
-              <a:rPr sz="1500">
-                <a:solidFill>
-                  <a:srgbClr val="22282E"/>
-                </a:solidFill>
-              </a:rPr>
-              <a:t>•  Valora el activo (AV): estima el valor de la plataforma en 500.000 €.</a:t>
-            </a:r>
-          </a:p>
-          <a:p>
-            <a:pPr>
-              <a:spcAft>
-                <a:spcPts val="600"/>
-              </a:spcAft>
-            </a:pPr>
-            <a:r>
-              <a:rPr sz="1500">
-                <a:solidFill>
-                  <a:srgbClr val="22282E"/>
-                </a:solidFill>
-              </a:rPr>
-              <a:t>•  Factor de exposición (EF): un cifrado por ransomware deja el sistema inoperante; estima EF = 0,6 (pérdida del 60%).</a:t>
-            </a:r>
-          </a:p>
-          <a:p>
-            <a:pPr>
-              <a:spcAft>
-                <a:spcPts val="600"/>
-              </a:spcAft>
-            </a:pPr>
-            <a:r>
-              <a:rPr sz="1500">
-                <a:solidFill>
-                  <a:srgbClr val="22282E"/>
-                </a:solidFill>
-              </a:rPr>
-              <a:t>•  SLE: calcula SLE = 500.000 × 0,6 = 300.000 €.</a:t>
-            </a:r>
-          </a:p>
-          <a:p>
-            <a:pPr>
-              <a:spcAft>
-                <a:spcPts val="600"/>
-              </a:spcAft>
-            </a:pPr>
-            <a:r>
-              <a:rPr sz="1500">
-                <a:solidFill>
-                  <a:srgbClr val="22282E"/>
-                </a:solidFill>
-              </a:rPr>
-              <a:t>•  ARO: según incidentes del sector estimas 0,2 (uno cada 5 años). Calcula ALE = 300.000 × 0,2 = 60.000 €/año.</a:t>
-            </a:r>
-          </a:p>
-          <a:p>
-            <a:pPr>
-              <a:spcAft>
-                <a:spcPts val="600"/>
-              </a:spcAft>
-            </a:pPr>
-            <a:r>
-              <a:rPr sz="1500">
-                <a:solidFill>
-                  <a:srgbClr val="22282E"/>
-                </a:solidFill>
-              </a:rPr>
-              <a:t>•  Control propuesto: backups inmutables + EDR por 25.000 €/año, que reducen el ARO a 0,05. Nuevo ALEdespués = 300.000 × 0,05 = 15.000 €.</a:t>
-            </a:r>
-          </a:p>
-          <a:p>
-            <a:pPr>
-              <a:spcAft>
-                <a:spcPts val="600"/>
-              </a:spcAft>
-            </a:pPr>
-            <a:r>
-              <a:rPr sz="1500">
-                <a:solidFill>
-                  <a:srgbClr val="22282E"/>
-                </a:solidFill>
-              </a:rPr>
-              <a:t>•  ROSI: (60.000 − 15.000 − 25.000) / 25.000 = 0,8 → 80% de retorno. El control se justifica.</a:t>
+              <a:t>•  Hay dominio cuando el alumno formula escenarios, evita falsa precisión, justifica método y compara tratamientos mediante riesgo residual.</a:t>
             </a:r>
           </a:p>
         </p:txBody>
@@ -4599,7 +4960,7 @@
                   <a:srgbClr val="0B3D2E"/>
                 </a:solidFill>
               </a:rPr>
-              <a:t>✍️ Ejercicios</a:t>
+              <a:t>📖 Definiciones y características</a:t>
             </a:r>
           </a:p>
         </p:txBody>
@@ -4637,82 +4998,97 @@
                   <a:srgbClr val="22282E"/>
                 </a:solidFill>
               </a:rPr>
-              <a:t>•  Calcula el ALE de un robo de portátil: AV=1.500 €, EF=1, ARO=3.</a:t>
-            </a:r>
-          </a:p>
-          <a:p>
-            <a:pPr>
-              <a:spcAft>
-                <a:spcPts val="600"/>
-              </a:spcAft>
-            </a:pPr>
-            <a:r>
-              <a:rPr sz="1500">
-                <a:solidFill>
-                  <a:srgbClr val="22282E"/>
-                </a:solidFill>
-              </a:rPr>
-              <a:t>•  Un control cuesta 10.000 € y baja el ALE de 40.000 a 12.000 €. ¿Cuál es el ROSI?</a:t>
-            </a:r>
-          </a:p>
-          <a:p>
-            <a:pPr>
-              <a:spcAft>
-                <a:spcPts val="600"/>
-              </a:spcAft>
-            </a:pPr>
-            <a:r>
-              <a:rPr sz="1500">
-                <a:solidFill>
-                  <a:srgbClr val="22282E"/>
-                </a:solidFill>
-              </a:rPr>
-              <a:t>•  Convierte esta matriz cualitativa a decisión: probabilidad media, impacto catastrófico. ¿Aceptas o mitigas?</a:t>
-            </a:r>
-          </a:p>
-          <a:p>
-            <a:pPr>
-              <a:spcAft>
-                <a:spcPts val="600"/>
-              </a:spcAft>
-            </a:pPr>
-            <a:r>
-              <a:rPr sz="1500">
-                <a:solidFill>
-                  <a:srgbClr val="22282E"/>
-                </a:solidFill>
-              </a:rPr>
-              <a:t>•  Da un intervalo de confianza del 90% para "cuántos empleados hará clic en un phishing de 100 enviados". Justifica.</a:t>
-            </a:r>
-          </a:p>
-          <a:p>
-            <a:pPr>
-              <a:spcAft>
-                <a:spcPts val="600"/>
-              </a:spcAft>
-            </a:pPr>
-            <a:r>
-              <a:rPr sz="1500">
-                <a:solidFill>
-                  <a:srgbClr val="22282E"/>
-                </a:solidFill>
-              </a:rPr>
-              <a:t>•  Explica por qué el ALE puede engañar cuando el impacto es raro pero catastrófico (cola larga).</a:t>
-            </a:r>
-          </a:p>
-          <a:p>
-            <a:pPr>
-              <a:spcAft>
-                <a:spcPts val="600"/>
-              </a:spcAft>
-            </a:pPr>
-            <a:r>
-              <a:rPr sz="1500">
-                <a:solidFill>
-                  <a:srgbClr val="22282E"/>
-                </a:solidFill>
-              </a:rPr>
-              <a:t>•  Diseña un Montecarlo para una brecha de datos con multa GDPR variable.</a:t>
+              <a:t>•  Riesgo: probabilidad de que una amenaza explote una vulnerabilidad causando un impacto. Clave: riesgo = f(probabilidad, impacto).</a:t>
+            </a:r>
+          </a:p>
+          <a:p>
+            <a:pPr>
+              <a:spcAft>
+                <a:spcPts val="600"/>
+              </a:spcAft>
+            </a:pPr>
+            <a:r>
+              <a:rPr sz="1500">
+                <a:solidFill>
+                  <a:srgbClr val="22282E"/>
+                </a:solidFill>
+              </a:rPr>
+              <a:t>•  SLE (Single Loss Expectancy): pérdida esperada de un único incidente. Clave: SLE = Valor del activo (AV) × Factor de exposición (EF).</a:t>
+            </a:r>
+          </a:p>
+          <a:p>
+            <a:pPr>
+              <a:spcAft>
+                <a:spcPts val="600"/>
+              </a:spcAft>
+            </a:pPr>
+            <a:r>
+              <a:rPr sz="1500">
+                <a:solidFill>
+                  <a:srgbClr val="22282E"/>
+                </a:solidFill>
+              </a:rPr>
+              <a:t>•  ARO (Annualized Rate of Occurrence): número esperado de ocurrencias al año. Clave: 0,1 significa "una vez cada 10 años".</a:t>
+            </a:r>
+          </a:p>
+          <a:p>
+            <a:pPr>
+              <a:spcAft>
+                <a:spcPts val="600"/>
+              </a:spcAft>
+            </a:pPr>
+            <a:r>
+              <a:rPr sz="1500">
+                <a:solidFill>
+                  <a:srgbClr val="22282E"/>
+                </a:solidFill>
+              </a:rPr>
+              <a:t>•  ALE (Annualized Loss Expectancy): pérdida anual esperada. Clave: ALE = SLE × ARO.</a:t>
+            </a:r>
+          </a:p>
+          <a:p>
+            <a:pPr>
+              <a:spcAft>
+                <a:spcPts val="600"/>
+              </a:spcAft>
+            </a:pPr>
+            <a:r>
+              <a:rPr sz="1500">
+                <a:solidFill>
+                  <a:srgbClr val="22282E"/>
+                </a:solidFill>
+              </a:rPr>
+              <a:t>•  ROSI: retorno de inversión en seguridad. Clave: ROSI = (ALEantes − ALEdespués − costecontrol) / costecontrol.</a:t>
+            </a:r>
+          </a:p>
+          <a:p>
+            <a:pPr>
+              <a:spcAft>
+                <a:spcPts val="600"/>
+              </a:spcAft>
+            </a:pPr>
+            <a:r>
+              <a:rPr sz="1500">
+                <a:solidFill>
+                  <a:srgbClr val="22282E"/>
+                </a:solidFill>
+              </a:rPr>
+              <a:t>•  Riesgo residual: el que queda tras aplicar controles. Clave: nunca es cero; se acepta formalmente.</a:t>
+            </a:r>
+          </a:p>
+          <a:p>
+            <a:pPr>
+              <a:spcAft>
+                <a:spcPts val="600"/>
+              </a:spcAft>
+            </a:pPr>
+            <a:r>
+              <a:rPr sz="1500">
+                <a:solidFill>
+                  <a:srgbClr val="22282E"/>
+                </a:solidFill>
+              </a:rPr>
+              <a:t>•  Estimación calibrada: dar rangos con un intervalo de confianza (p. ej. 90%) en lugar de un punto. Clave: reduce el exceso de confianza del experto.</a:t>
             </a:r>
           </a:p>
         </p:txBody>
@@ -4763,7 +5139,7 @@
                   <a:srgbClr val="0B3D2E"/>
                 </a:solidFill>
               </a:rPr>
-              <a:t>📝 Reto verificable</a:t>
+              <a:t>🧰 Herramientas y preparación</a:t>
             </a:r>
           </a:p>
         </p:txBody>
@@ -4801,22 +5177,52 @@
                   <a:srgbClr val="22282E"/>
                 </a:solidFill>
               </a:rPr>
-              <a:t>•  Entrega una hoja de cálculo de análisis de riesgo cuantitativo para tres escenarios (ransomware, brecha de datos, caída de disponibilidad) con SLE, ARO, ALE, control propuesto, ALE residual y ROSI de cada uno, más una matriz cualitativa 5×5 que los ubique.</a:t>
-            </a:r>
-          </a:p>
-          <a:p>
-            <a:pPr>
-              <a:spcAft>
-                <a:spcPts val="600"/>
-              </a:spcAft>
-            </a:pPr>
-            <a:r>
-              <a:rPr sz="1500">
-                <a:solidFill>
-                  <a:srgbClr val="22282E"/>
-                </a:solidFill>
-              </a:rPr>
-              <a:t>•  Criterio de aceptación: las fórmulas están enlazadas (no números pegados), cada control muestra un ROSI calculado, y la recomendación de tratamiento (mitigar/transferir/aceptar) es coherente con el ROSI y la posición en la matriz.</a:t>
+              <a:t>•  Hoja de cálculo (LibreOffice Calc / Excel / Google Sheets) para las fórmulas SLE/ARO/ALE.</a:t>
+            </a:r>
+          </a:p>
+          <a:p>
+            <a:pPr>
+              <a:spcAft>
+                <a:spcPts val="600"/>
+              </a:spcAft>
+            </a:pPr>
+            <a:r>
+              <a:rPr sz="1500">
+                <a:solidFill>
+                  <a:srgbClr val="22282E"/>
+                </a:solidFill>
+              </a:rPr>
+              <a:t>•  Opcional: Python con numpy para una simulación de Montecarlo (pip install numpy).</a:t>
+            </a:r>
+          </a:p>
+          <a:p>
+            <a:pPr>
+              <a:spcAft>
+                <a:spcPts val="600"/>
+              </a:spcAft>
+            </a:pPr>
+            <a:r>
+              <a:rPr sz="1500">
+                <a:solidFill>
+                  <a:srgbClr val="22282E"/>
+                </a:solidFill>
+              </a:rPr>
+              <a:t>•  Referencia metodológica: FAIR (Factor Analysis of Information Risk) de The Open Group, y NIST SP 800-30 (Guide for Conducting Risk Assessments).</a:t>
+            </a:r>
+          </a:p>
+          <a:p>
+            <a:pPr>
+              <a:spcAft>
+                <a:spcPts val="600"/>
+              </a:spcAft>
+            </a:pPr>
+            <a:r>
+              <a:rPr sz="1500">
+                <a:solidFill>
+                  <a:srgbClr val="22282E"/>
+                </a:solidFill>
+              </a:rPr>
+              <a:t>•  Una plantilla de matriz de riesgo 5×5 (la crearás tú en el laboratorio).</a:t>
             </a:r>
           </a:p>
         </p:txBody>
